--- a/presentation/OSOS-Delivery.pptx
+++ b/presentation/OSOS-Delivery.pptx
@@ -30983,7 +30983,7 @@
                 </a:solidFill>
                 <a:latin typeface="Segoe UI"/>
               </a:rPr>
-              <a:t>  Its address is a DHCP reservation on MAC 00-00-36-7F-04-55, because CFG_METER_HOST is a compile-time constant.</a:t>
+              <a:t>  Its address is a DHCP reservation on MAC xx-xx-xx-xx-xx-xx, because CFG_METER_HOST is a compile-time constant.</a:t>
             </a:r>
           </a:p>
         </p:txBody>
@@ -34360,7 +34360,7 @@
                 </a:solidFill>
                 <a:latin typeface="Consolas"/>
               </a:rPr>
-              <a:t>SSID IKOM_Bilisim</a:t>
+              <a:t>SSID your-ssid</a:t>
             </a:r>
           </a:p>
         </p:txBody>
@@ -39932,7 +39932,7 @@
                 </a:solidFill>
                 <a:latin typeface="Consolas"/>
               </a:rPr>
-              <a:t>Ethernet II   MAC 00-00-36-7F-04-55</a:t>
+              <a:t>Ethernet II   MAC xx-xx-xx-xx-xx-xx</a:t>
             </a:r>
           </a:p>
         </p:txBody>
@@ -39974,7 +39974,7 @@
                 </a:solidFill>
                 <a:latin typeface="Consolas"/>
               </a:rPr>
-              <a:t>802.11 b/g/n   CSMA/CA, SSID IKOM_Bilisim</a:t>
+              <a:t>802.11 b/g/n   CSMA/CA, SSID your-ssid</a:t>
             </a:r>
           </a:p>
         </p:txBody>
